--- a/PPT/DSGA_5Min_Presentation_Redesigned.pptx
+++ b/PPT/DSGA_5Min_Presentation_Redesigned.pptx
@@ -4,18 +4,21 @@
   <p:sldMasterIdLst>
     <p:sldMasterId id="2147483648" r:id="rId1"/>
   </p:sldMasterIdLst>
+  <p:notesMasterIdLst>
+    <p:notesMasterId r:id="rId11"/>
+  </p:notesMasterIdLst>
   <p:sldIdLst>
-    <p:sldId id="256" r:id="rId7"/>
-    <p:sldId id="257" r:id="rId9"/>
-    <p:sldId id="258" r:id="rId10"/>
-    <p:sldId id="259" r:id="rId11"/>
-    <p:sldId id="260" r:id="rId12"/>
-    <p:sldId id="261" r:id="rId13"/>
-    <p:sldId id="262" r:id="rId14"/>
-    <p:sldId id="263" r:id="rId15"/>
-    <p:sldId id="264" r:id="rId16"/>
+    <p:sldId id="256" r:id="rId2"/>
+    <p:sldId id="257" r:id="rId3"/>
+    <p:sldId id="258" r:id="rId4"/>
+    <p:sldId id="259" r:id="rId5"/>
+    <p:sldId id="260" r:id="rId6"/>
+    <p:sldId id="261" r:id="rId7"/>
+    <p:sldId id="262" r:id="rId8"/>
+    <p:sldId id="263" r:id="rId9"/>
+    <p:sldId id="264" r:id="rId10"/>
   </p:sldIdLst>
-  <p:sldSz cx="12191695" cy="6858000" type="screen4x3"/>
+  <p:sldSz cx="12192000" cy="6858000"/>
   <p:notesSz cx="6858000" cy="9144000"/>
   <p:defaultTextStyle>
     <a:defPPr>
@@ -116,7 +119,7 @@
 </file>
 
 <file path=ppt/notesMasters/notesMaster1.xml><?xml version="1.0" encoding="utf-8"?>
-<p:notesMaster xmlns:a="http://schemas.openxmlformats.org/drawingml/2006/main" xmlns:p="http://schemas.openxmlformats.org/presentationml/2006/main" xmlns:r="http://schemas.openxmlformats.org/officeDocument/2006/relationships">
+<p:notesMaster xmlns:a="http://schemas.openxmlformats.org/drawingml/2006/main" xmlns:r="http://schemas.openxmlformats.org/officeDocument/2006/relationships" xmlns:p="http://schemas.openxmlformats.org/presentationml/2006/main">
   <p:cSld>
     <p:bg>
       <p:bgRef idx="1001">
@@ -195,9 +198,9 @@
             </a:lvl1pPr>
           </a:lstStyle>
           <a:p>
-            <a:fld id="{0F89C1C7-3DCD-1040-A9CF-14679D8B5DDD}" type="datetimeFigureOut">
+            <a:fld id="{B4C86246-0218-4C10-838D-8A618BAEECB1}" type="datetimeFigureOut">
               <a:rPr lang="en-US" smtClean="0"/>
-              <a:t>10/17/16</a:t>
+              <a:t>9/27/2026</a:t>
             </a:fld>
             <a:endParaRPr lang="en-US"/>
           </a:p>
@@ -215,8 +218,8 @@
         </p:nvSpPr>
         <p:spPr>
           <a:xfrm>
-            <a:off x="1143000" y="685800"/>
-            <a:ext cx="4572000" cy="3429000"/>
+            <a:off x="381000" y="685800"/>
+            <a:ext cx="6096000" cy="3429000"/>
           </a:xfrm>
           <a:prstGeom prst="rect">
             <a:avLst/>
@@ -256,7 +259,9 @@
           </a:prstGeom>
         </p:spPr>
         <p:txBody>
-          <a:bodyPr vert="horz" lIns="91440" tIns="45720" rIns="91440" bIns="45720" rtlCol="0"/>
+          <a:bodyPr vert="horz" lIns="91440" tIns="45720" rIns="91440" bIns="45720" rtlCol="0">
+            <a:normAutofit/>
+          </a:bodyPr>
           <a:lstStyle/>
           <a:p>
             <a:pPr lvl="0"/>
@@ -354,7 +359,7 @@
             </a:lvl1pPr>
           </a:lstStyle>
           <a:p>
-            <a:fld id="{BB5E49A5-4136-284D-997B-48E1D791AD67}" type="slidenum">
+            <a:fld id="{6BF94D44-ADC4-49CB-BF39-47666AFBA048}" type="slidenum">
               <a:rPr lang="en-US" smtClean="0"/>
               <a:t>‹#›</a:t>
             </a:fld>
@@ -363,15 +368,10 @@
         </p:txBody>
       </p:sp>
     </p:spTree>
-    <p:extLst>
-      <p:ext uri="{BB962C8B-B14F-4D97-AF65-F5344CB8AC3E}">
-        <p14:creationId xmlns:p14="http://schemas.microsoft.com/office/powerpoint/2010/main" val="2623252185"/>
-      </p:ext>
-    </p:extLst>
   </p:cSld>
   <p:clrMap bg1="lt1" tx1="dk1" bg2="lt2" tx2="dk2" accent1="accent1" accent2="accent2" accent3="accent3" accent4="accent4" accent5="accent5" accent6="accent6" hlink="hlink" folHlink="folHlink"/>
   <p:notesStyle>
-    <a:lvl1pPr marL="0" algn="l" defTabSz="457200" rtl="0" eaLnBrk="1" latinLnBrk="0" hangingPunct="1">
+    <a:lvl1pPr marL="0" algn="l" defTabSz="914400" rtl="0" eaLnBrk="1" latinLnBrk="0" hangingPunct="1">
       <a:defRPr sz="1200" kern="1200">
         <a:solidFill>
           <a:schemeClr val="tx1"/>
@@ -381,7 +381,7 @@
         <a:cs typeface="+mn-cs"/>
       </a:defRPr>
     </a:lvl1pPr>
-    <a:lvl2pPr marL="457200" algn="l" defTabSz="457200" rtl="0" eaLnBrk="1" latinLnBrk="0" hangingPunct="1">
+    <a:lvl2pPr marL="457200" algn="l" defTabSz="914400" rtl="0" eaLnBrk="1" latinLnBrk="0" hangingPunct="1">
       <a:defRPr sz="1200" kern="1200">
         <a:solidFill>
           <a:schemeClr val="tx1"/>
@@ -391,7 +391,7 @@
         <a:cs typeface="+mn-cs"/>
       </a:defRPr>
     </a:lvl2pPr>
-    <a:lvl3pPr marL="914400" algn="l" defTabSz="457200" rtl="0" eaLnBrk="1" latinLnBrk="0" hangingPunct="1">
+    <a:lvl3pPr marL="914400" algn="l" defTabSz="914400" rtl="0" eaLnBrk="1" latinLnBrk="0" hangingPunct="1">
       <a:defRPr sz="1200" kern="1200">
         <a:solidFill>
           <a:schemeClr val="tx1"/>
@@ -401,7 +401,7 @@
         <a:cs typeface="+mn-cs"/>
       </a:defRPr>
     </a:lvl3pPr>
-    <a:lvl4pPr marL="1371600" algn="l" defTabSz="457200" rtl="0" eaLnBrk="1" latinLnBrk="0" hangingPunct="1">
+    <a:lvl4pPr marL="1371600" algn="l" defTabSz="914400" rtl="0" eaLnBrk="1" latinLnBrk="0" hangingPunct="1">
       <a:defRPr sz="1200" kern="1200">
         <a:solidFill>
           <a:schemeClr val="tx1"/>
@@ -411,7 +411,7 @@
         <a:cs typeface="+mn-cs"/>
       </a:defRPr>
     </a:lvl4pPr>
-    <a:lvl5pPr marL="1828800" algn="l" defTabSz="457200" rtl="0" eaLnBrk="1" latinLnBrk="0" hangingPunct="1">
+    <a:lvl5pPr marL="1828800" algn="l" defTabSz="914400" rtl="0" eaLnBrk="1" latinLnBrk="0" hangingPunct="1">
       <a:defRPr sz="1200" kern="1200">
         <a:solidFill>
           <a:schemeClr val="tx1"/>
@@ -421,7 +421,7 @@
         <a:cs typeface="+mn-cs"/>
       </a:defRPr>
     </a:lvl5pPr>
-    <a:lvl6pPr marL="2286000" algn="l" defTabSz="457200" rtl="0" eaLnBrk="1" latinLnBrk="0" hangingPunct="1">
+    <a:lvl6pPr marL="2286000" algn="l" defTabSz="914400" rtl="0" eaLnBrk="1" latinLnBrk="0" hangingPunct="1">
       <a:defRPr sz="1200" kern="1200">
         <a:solidFill>
           <a:schemeClr val="tx1"/>
@@ -431,7 +431,7 @@
         <a:cs typeface="+mn-cs"/>
       </a:defRPr>
     </a:lvl6pPr>
-    <a:lvl7pPr marL="2743200" algn="l" defTabSz="457200" rtl="0" eaLnBrk="1" latinLnBrk="0" hangingPunct="1">
+    <a:lvl7pPr marL="2743200" algn="l" defTabSz="914400" rtl="0" eaLnBrk="1" latinLnBrk="0" hangingPunct="1">
       <a:defRPr sz="1200" kern="1200">
         <a:solidFill>
           <a:schemeClr val="tx1"/>
@@ -441,7 +441,7 @@
         <a:cs typeface="+mn-cs"/>
       </a:defRPr>
     </a:lvl7pPr>
-    <a:lvl8pPr marL="3200400" algn="l" defTabSz="457200" rtl="0" eaLnBrk="1" latinLnBrk="0" hangingPunct="1">
+    <a:lvl8pPr marL="3200400" algn="l" defTabSz="914400" rtl="0" eaLnBrk="1" latinLnBrk="0" hangingPunct="1">
       <a:defRPr sz="1200" kern="1200">
         <a:solidFill>
           <a:schemeClr val="tx1"/>
@@ -451,7 +451,7 @@
         <a:cs typeface="+mn-cs"/>
       </a:defRPr>
     </a:lvl8pPr>
-    <a:lvl9pPr marL="3657600" algn="l" defTabSz="457200" rtl="0" eaLnBrk="1" latinLnBrk="0" hangingPunct="1">
+    <a:lvl9pPr marL="3657600" algn="l" defTabSz="914400" rtl="0" eaLnBrk="1" latinLnBrk="0" hangingPunct="1">
       <a:defRPr sz="1200" kern="1200">
         <a:solidFill>
           <a:schemeClr val="tx1"/>
@@ -466,7 +466,7 @@
 </file>
 
 <file path=ppt/notesSlides/notesSlide1.xml><?xml version="1.0" encoding="utf-8"?>
-<p:notes xmlns:a="http://schemas.openxmlformats.org/drawingml/2006/main" xmlns:p="http://schemas.openxmlformats.org/presentationml/2006/main" xmlns:r="http://schemas.openxmlformats.org/officeDocument/2006/relationships">
+<p:notes xmlns:a="http://schemas.openxmlformats.org/drawingml/2006/main" xmlns:r="http://schemas.openxmlformats.org/officeDocument/2006/relationships" xmlns:p="http://schemas.openxmlformats.org/presentationml/2006/main">
   <p:cSld>
     <p:spTree>
       <p:nvGrpSpPr>
@@ -486,7 +486,7 @@
         <p:nvSpPr>
           <p:cNvPr id="2" name="Slide Image Placeholder 1"/>
           <p:cNvSpPr>
-            <a:spLocks noGrp="1"/>
+            <a:spLocks noGrp="1" noRot="1" noChangeAspect="1"/>
           </p:cNvSpPr>
           <p:nvPr>
             <p:ph type="sldImg" idx="2"/>
@@ -501,7 +501,7 @@
             <a:spLocks noGrp="1"/>
           </p:cNvSpPr>
           <p:nvPr>
-            <p:ph type="body" idx="3" sz="quarter"/>
+            <p:ph type="body" sz="quarter" idx="3"/>
           </p:nvPr>
         </p:nvSpPr>
         <p:spPr/>
@@ -537,7 +537,7 @@
             <a:spLocks noGrp="1"/>
           </p:cNvSpPr>
           <p:nvPr>
-            <p:ph type="sldNum" idx="5" sz="quarter"/>
+            <p:ph type="sldNum" sz="quarter" idx="5"/>
           </p:nvPr>
         </p:nvSpPr>
         <p:spPr/>
@@ -551,7 +551,7 @@
 </file>
 
 <file path=ppt/notesSlides/notesSlide2.xml><?xml version="1.0" encoding="utf-8"?>
-<p:notes xmlns:a="http://schemas.openxmlformats.org/drawingml/2006/main" xmlns:p="http://schemas.openxmlformats.org/presentationml/2006/main" xmlns:r="http://schemas.openxmlformats.org/officeDocument/2006/relationships">
+<p:notes xmlns:a="http://schemas.openxmlformats.org/drawingml/2006/main" xmlns:r="http://schemas.openxmlformats.org/officeDocument/2006/relationships" xmlns:p="http://schemas.openxmlformats.org/presentationml/2006/main">
   <p:cSld>
     <p:spTree>
       <p:nvGrpSpPr>
@@ -571,7 +571,7 @@
         <p:nvSpPr>
           <p:cNvPr id="2" name="Slide Image Placeholder 1"/>
           <p:cNvSpPr>
-            <a:spLocks noGrp="1"/>
+            <a:spLocks noGrp="1" noRot="1" noChangeAspect="1"/>
           </p:cNvSpPr>
           <p:nvPr>
             <p:ph type="sldImg" idx="2"/>
@@ -586,7 +586,7 @@
             <a:spLocks noGrp="1"/>
           </p:cNvSpPr>
           <p:nvPr>
-            <p:ph type="body" idx="3" sz="quarter"/>
+            <p:ph type="body" sz="quarter" idx="3"/>
           </p:nvPr>
         </p:nvSpPr>
         <p:spPr/>
@@ -652,7 +652,7 @@
             <a:spLocks noGrp="1"/>
           </p:cNvSpPr>
           <p:nvPr>
-            <p:ph type="sldNum" idx="5" sz="quarter"/>
+            <p:ph type="sldNum" sz="quarter" idx="5"/>
           </p:nvPr>
         </p:nvSpPr>
         <p:spPr/>
@@ -666,7 +666,7 @@
 </file>
 
 <file path=ppt/notesSlides/notesSlide3.xml><?xml version="1.0" encoding="utf-8"?>
-<p:notes xmlns:a="http://schemas.openxmlformats.org/drawingml/2006/main" xmlns:p="http://schemas.openxmlformats.org/presentationml/2006/main" xmlns:r="http://schemas.openxmlformats.org/officeDocument/2006/relationships">
+<p:notes xmlns:a="http://schemas.openxmlformats.org/drawingml/2006/main" xmlns:r="http://schemas.openxmlformats.org/officeDocument/2006/relationships" xmlns:p="http://schemas.openxmlformats.org/presentationml/2006/main">
   <p:cSld>
     <p:spTree>
       <p:nvGrpSpPr>
@@ -686,7 +686,7 @@
         <p:nvSpPr>
           <p:cNvPr id="2" name="Slide Image Placeholder 1"/>
           <p:cNvSpPr>
-            <a:spLocks noGrp="1"/>
+            <a:spLocks noGrp="1" noRot="1" noChangeAspect="1"/>
           </p:cNvSpPr>
           <p:nvPr>
             <p:ph type="sldImg" idx="2"/>
@@ -701,7 +701,7 @@
             <a:spLocks noGrp="1"/>
           </p:cNvSpPr>
           <p:nvPr>
-            <p:ph type="body" idx="3" sz="quarter"/>
+            <p:ph type="body" sz="quarter" idx="3"/>
           </p:nvPr>
         </p:nvSpPr>
         <p:spPr/>
@@ -762,7 +762,7 @@
             <a:spLocks noGrp="1"/>
           </p:cNvSpPr>
           <p:nvPr>
-            <p:ph type="sldNum" idx="5" sz="quarter"/>
+            <p:ph type="sldNum" sz="quarter" idx="5"/>
           </p:nvPr>
         </p:nvSpPr>
         <p:spPr/>
@@ -776,7 +776,7 @@
 </file>
 
 <file path=ppt/notesSlides/notesSlide4.xml><?xml version="1.0" encoding="utf-8"?>
-<p:notes xmlns:a="http://schemas.openxmlformats.org/drawingml/2006/main" xmlns:p="http://schemas.openxmlformats.org/presentationml/2006/main" xmlns:r="http://schemas.openxmlformats.org/officeDocument/2006/relationships">
+<p:notes xmlns:a="http://schemas.openxmlformats.org/drawingml/2006/main" xmlns:r="http://schemas.openxmlformats.org/officeDocument/2006/relationships" xmlns:p="http://schemas.openxmlformats.org/presentationml/2006/main">
   <p:cSld>
     <p:spTree>
       <p:nvGrpSpPr>
@@ -796,7 +796,7 @@
         <p:nvSpPr>
           <p:cNvPr id="2" name="Slide Image Placeholder 1"/>
           <p:cNvSpPr>
-            <a:spLocks noGrp="1"/>
+            <a:spLocks noGrp="1" noRot="1" noChangeAspect="1"/>
           </p:cNvSpPr>
           <p:nvPr>
             <p:ph type="sldImg" idx="2"/>
@@ -811,7 +811,7 @@
             <a:spLocks noGrp="1"/>
           </p:cNvSpPr>
           <p:nvPr>
-            <p:ph type="body" idx="3" sz="quarter"/>
+            <p:ph type="body" sz="quarter" idx="3"/>
           </p:nvPr>
         </p:nvSpPr>
         <p:spPr/>
@@ -862,7 +862,7 @@
             <a:spLocks noGrp="1"/>
           </p:cNvSpPr>
           <p:nvPr>
-            <p:ph type="sldNum" idx="5" sz="quarter"/>
+            <p:ph type="sldNum" sz="quarter" idx="5"/>
           </p:nvPr>
         </p:nvSpPr>
         <p:spPr/>
@@ -876,7 +876,7 @@
 </file>
 
 <file path=ppt/notesSlides/notesSlide5.xml><?xml version="1.0" encoding="utf-8"?>
-<p:notes xmlns:a="http://schemas.openxmlformats.org/drawingml/2006/main" xmlns:p="http://schemas.openxmlformats.org/presentationml/2006/main" xmlns:r="http://schemas.openxmlformats.org/officeDocument/2006/relationships">
+<p:notes xmlns:a="http://schemas.openxmlformats.org/drawingml/2006/main" xmlns:r="http://schemas.openxmlformats.org/officeDocument/2006/relationships" xmlns:p="http://schemas.openxmlformats.org/presentationml/2006/main">
   <p:cSld>
     <p:spTree>
       <p:nvGrpSpPr>
@@ -896,7 +896,7 @@
         <p:nvSpPr>
           <p:cNvPr id="2" name="Slide Image Placeholder 1"/>
           <p:cNvSpPr>
-            <a:spLocks noGrp="1"/>
+            <a:spLocks noGrp="1" noRot="1" noChangeAspect="1"/>
           </p:cNvSpPr>
           <p:nvPr>
             <p:ph type="sldImg" idx="2"/>
@@ -911,7 +911,7 @@
             <a:spLocks noGrp="1"/>
           </p:cNvSpPr>
           <p:nvPr>
-            <p:ph type="body" idx="3" sz="quarter"/>
+            <p:ph type="body" sz="quarter" idx="3"/>
           </p:nvPr>
         </p:nvSpPr>
         <p:spPr/>
@@ -972,7 +972,7 @@
             <a:spLocks noGrp="1"/>
           </p:cNvSpPr>
           <p:nvPr>
-            <p:ph type="sldNum" idx="5" sz="quarter"/>
+            <p:ph type="sldNum" sz="quarter" idx="5"/>
           </p:nvPr>
         </p:nvSpPr>
         <p:spPr/>
@@ -986,7 +986,7 @@
 </file>
 
 <file path=ppt/notesSlides/notesSlide6.xml><?xml version="1.0" encoding="utf-8"?>
-<p:notes xmlns:a="http://schemas.openxmlformats.org/drawingml/2006/main" xmlns:p="http://schemas.openxmlformats.org/presentationml/2006/main" xmlns:r="http://schemas.openxmlformats.org/officeDocument/2006/relationships">
+<p:notes xmlns:a="http://schemas.openxmlformats.org/drawingml/2006/main" xmlns:r="http://schemas.openxmlformats.org/officeDocument/2006/relationships" xmlns:p="http://schemas.openxmlformats.org/presentationml/2006/main">
   <p:cSld>
     <p:spTree>
       <p:nvGrpSpPr>
@@ -1006,7 +1006,7 @@
         <p:nvSpPr>
           <p:cNvPr id="2" name="Slide Image Placeholder 1"/>
           <p:cNvSpPr>
-            <a:spLocks noGrp="1"/>
+            <a:spLocks noGrp="1" noRot="1" noChangeAspect="1"/>
           </p:cNvSpPr>
           <p:nvPr>
             <p:ph type="sldImg" idx="2"/>
@@ -1021,7 +1021,7 @@
             <a:spLocks noGrp="1"/>
           </p:cNvSpPr>
           <p:nvPr>
-            <p:ph type="body" idx="3" sz="quarter"/>
+            <p:ph type="body" sz="quarter" idx="3"/>
           </p:nvPr>
         </p:nvSpPr>
         <p:spPr/>
@@ -1067,7 +1067,7 @@
             <a:spLocks noGrp="1"/>
           </p:cNvSpPr>
           <p:nvPr>
-            <p:ph type="sldNum" idx="5" sz="quarter"/>
+            <p:ph type="sldNum" sz="quarter" idx="5"/>
           </p:nvPr>
         </p:nvSpPr>
         <p:spPr/>
@@ -1081,7 +1081,7 @@
 </file>
 
 <file path=ppt/notesSlides/notesSlide7.xml><?xml version="1.0" encoding="utf-8"?>
-<p:notes xmlns:a="http://schemas.openxmlformats.org/drawingml/2006/main" xmlns:p="http://schemas.openxmlformats.org/presentationml/2006/main" xmlns:r="http://schemas.openxmlformats.org/officeDocument/2006/relationships">
+<p:notes xmlns:a="http://schemas.openxmlformats.org/drawingml/2006/main" xmlns:r="http://schemas.openxmlformats.org/officeDocument/2006/relationships" xmlns:p="http://schemas.openxmlformats.org/presentationml/2006/main">
   <p:cSld>
     <p:spTree>
       <p:nvGrpSpPr>
@@ -1101,7 +1101,7 @@
         <p:nvSpPr>
           <p:cNvPr id="2" name="Slide Image Placeholder 1"/>
           <p:cNvSpPr>
-            <a:spLocks noGrp="1"/>
+            <a:spLocks noGrp="1" noRot="1" noChangeAspect="1"/>
           </p:cNvSpPr>
           <p:nvPr>
             <p:ph type="sldImg" idx="2"/>
@@ -1116,7 +1116,7 @@
             <a:spLocks noGrp="1"/>
           </p:cNvSpPr>
           <p:nvPr>
-            <p:ph type="body" idx="3" sz="quarter"/>
+            <p:ph type="body" sz="quarter" idx="3"/>
           </p:nvPr>
         </p:nvSpPr>
         <p:spPr/>
@@ -1177,7 +1177,7 @@
             <a:spLocks noGrp="1"/>
           </p:cNvSpPr>
           <p:nvPr>
-            <p:ph type="sldNum" idx="5" sz="quarter"/>
+            <p:ph type="sldNum" sz="quarter" idx="5"/>
           </p:nvPr>
         </p:nvSpPr>
         <p:spPr/>
@@ -1191,7 +1191,7 @@
 </file>
 
 <file path=ppt/notesSlides/notesSlide8.xml><?xml version="1.0" encoding="utf-8"?>
-<p:notes xmlns:a="http://schemas.openxmlformats.org/drawingml/2006/main" xmlns:p="http://schemas.openxmlformats.org/presentationml/2006/main" xmlns:r="http://schemas.openxmlformats.org/officeDocument/2006/relationships">
+<p:notes xmlns:a="http://schemas.openxmlformats.org/drawingml/2006/main" xmlns:r="http://schemas.openxmlformats.org/officeDocument/2006/relationships" xmlns:p="http://schemas.openxmlformats.org/presentationml/2006/main">
   <p:cSld>
     <p:spTree>
       <p:nvGrpSpPr>
@@ -1211,7 +1211,7 @@
         <p:nvSpPr>
           <p:cNvPr id="2" name="Slide Image Placeholder 1"/>
           <p:cNvSpPr>
-            <a:spLocks noGrp="1"/>
+            <a:spLocks noGrp="1" noRot="1" noChangeAspect="1"/>
           </p:cNvSpPr>
           <p:nvPr>
             <p:ph type="sldImg" idx="2"/>
@@ -1226,7 +1226,7 @@
             <a:spLocks noGrp="1"/>
           </p:cNvSpPr>
           <p:nvPr>
-            <p:ph type="body" idx="3" sz="quarter"/>
+            <p:ph type="body" sz="quarter" idx="3"/>
           </p:nvPr>
         </p:nvSpPr>
         <p:spPr/>
@@ -1287,7 +1287,7 @@
             <a:spLocks noGrp="1"/>
           </p:cNvSpPr>
           <p:nvPr>
-            <p:ph type="sldNum" idx="5" sz="quarter"/>
+            <p:ph type="sldNum" sz="quarter" idx="5"/>
           </p:nvPr>
         </p:nvSpPr>
         <p:spPr/>
@@ -1301,7 +1301,7 @@
 </file>
 
 <file path=ppt/notesSlides/notesSlide9.xml><?xml version="1.0" encoding="utf-8"?>
-<p:notes xmlns:a="http://schemas.openxmlformats.org/drawingml/2006/main" xmlns:p="http://schemas.openxmlformats.org/presentationml/2006/main" xmlns:r="http://schemas.openxmlformats.org/officeDocument/2006/relationships">
+<p:notes xmlns:a="http://schemas.openxmlformats.org/drawingml/2006/main" xmlns:r="http://schemas.openxmlformats.org/officeDocument/2006/relationships" xmlns:p="http://schemas.openxmlformats.org/presentationml/2006/main">
   <p:cSld>
     <p:spTree>
       <p:nvGrpSpPr>
@@ -1321,7 +1321,7 @@
         <p:nvSpPr>
           <p:cNvPr id="2" name="Slide Image Placeholder 1"/>
           <p:cNvSpPr>
-            <a:spLocks noGrp="1"/>
+            <a:spLocks noGrp="1" noRot="1" noChangeAspect="1"/>
           </p:cNvSpPr>
           <p:nvPr>
             <p:ph type="sldImg" idx="2"/>
@@ -1336,7 +1336,7 @@
             <a:spLocks noGrp="1"/>
           </p:cNvSpPr>
           <p:nvPr>
-            <p:ph type="body" idx="3" sz="quarter"/>
+            <p:ph type="body" sz="quarter" idx="3"/>
           </p:nvPr>
         </p:nvSpPr>
         <p:spPr/>
@@ -1377,7 +1377,7 @@
             <a:spLocks noGrp="1"/>
           </p:cNvSpPr>
           <p:nvPr>
-            <p:ph type="sldNum" idx="5" sz="quarter"/>
+            <p:ph type="sldNum" sz="quarter" idx="5"/>
           </p:nvPr>
         </p:nvSpPr>
         <p:spPr/>
@@ -1571,7 +1571,8 @@
           <a:p>
             <a:fld id="{5BCAD085-E8A6-8845-BD4E-CB4CCA059FC4}" type="datetimeFigureOut">
               <a:rPr lang="en-US" smtClean="0"/>
-              <a:t>1/27/13</a:t>
+              <a:pPr/>
+              <a:t>9/27/2026</a:t>
             </a:fld>
             <a:endParaRPr lang="en-US"/>
           </a:p>
@@ -1613,6 +1614,7 @@
           <a:p>
             <a:fld id="{C1FF6DA9-008F-8B48-92A6-B652298478BF}" type="slidenum">
               <a:rPr lang="en-US" smtClean="0"/>
+              <a:pPr/>
               <a:t>‹#›</a:t>
             </a:fld>
             <a:endParaRPr lang="en-US"/>
@@ -1622,7 +1624,7 @@
     </p:spTree>
     <p:extLst>
       <p:ext uri="{BB962C8B-B14F-4D97-AF65-F5344CB8AC3E}">
-        <p14:creationId xmlns:p14="http://schemas.microsoft.com/office/powerpoint/2010/main" val="3168075583"/>
+        <p14:creationId xmlns:p14="http://schemas.microsoft.com/office/powerpoint/2010/main" xmlns="" val="3168075583"/>
       </p:ext>
     </p:extLst>
   </p:cSld>
@@ -1741,7 +1743,8 @@
           <a:p>
             <a:fld id="{5BCAD085-E8A6-8845-BD4E-CB4CCA059FC4}" type="datetimeFigureOut">
               <a:rPr lang="en-US" smtClean="0"/>
-              <a:t>1/27/13</a:t>
+              <a:pPr/>
+              <a:t>9/27/2026</a:t>
             </a:fld>
             <a:endParaRPr lang="en-US"/>
           </a:p>
@@ -1783,6 +1786,7 @@
           <a:p>
             <a:fld id="{C1FF6DA9-008F-8B48-92A6-B652298478BF}" type="slidenum">
               <a:rPr lang="en-US" smtClean="0"/>
+              <a:pPr/>
               <a:t>‹#›</a:t>
             </a:fld>
             <a:endParaRPr lang="en-US"/>
@@ -1792,7 +1796,7 @@
     </p:spTree>
     <p:extLst>
       <p:ext uri="{BB962C8B-B14F-4D97-AF65-F5344CB8AC3E}">
-        <p14:creationId xmlns:p14="http://schemas.microsoft.com/office/powerpoint/2010/main" val="2910927964"/>
+        <p14:creationId xmlns:p14="http://schemas.microsoft.com/office/powerpoint/2010/main" xmlns="" val="2910927964"/>
       </p:ext>
     </p:extLst>
   </p:cSld>
@@ -1921,7 +1925,8 @@
           <a:p>
             <a:fld id="{5BCAD085-E8A6-8845-BD4E-CB4CCA059FC4}" type="datetimeFigureOut">
               <a:rPr lang="en-US" smtClean="0"/>
-              <a:t>1/27/13</a:t>
+              <a:pPr/>
+              <a:t>9/27/2026</a:t>
             </a:fld>
             <a:endParaRPr lang="en-US"/>
           </a:p>
@@ -1963,6 +1968,7 @@
           <a:p>
             <a:fld id="{C1FF6DA9-008F-8B48-92A6-B652298478BF}" type="slidenum">
               <a:rPr lang="en-US" smtClean="0"/>
+              <a:pPr/>
               <a:t>‹#›</a:t>
             </a:fld>
             <a:endParaRPr lang="en-US"/>
@@ -1972,7 +1978,7 @@
     </p:spTree>
     <p:extLst>
       <p:ext uri="{BB962C8B-B14F-4D97-AF65-F5344CB8AC3E}">
-        <p14:creationId xmlns:p14="http://schemas.microsoft.com/office/powerpoint/2010/main" val="3612223792"/>
+        <p14:creationId xmlns:p14="http://schemas.microsoft.com/office/powerpoint/2010/main" xmlns="" val="3612223792"/>
       </p:ext>
     </p:extLst>
   </p:cSld>
@@ -2091,7 +2097,8 @@
           <a:p>
             <a:fld id="{5BCAD085-E8A6-8845-BD4E-CB4CCA059FC4}" type="datetimeFigureOut">
               <a:rPr lang="en-US" smtClean="0"/>
-              <a:t>1/27/13</a:t>
+              <a:pPr/>
+              <a:t>9/27/2026</a:t>
             </a:fld>
             <a:endParaRPr lang="en-US"/>
           </a:p>
@@ -2133,6 +2140,7 @@
           <a:p>
             <a:fld id="{C1FF6DA9-008F-8B48-92A6-B652298478BF}" type="slidenum">
               <a:rPr lang="en-US" smtClean="0"/>
+              <a:pPr/>
               <a:t>‹#›</a:t>
             </a:fld>
             <a:endParaRPr lang="en-US"/>
@@ -2142,7 +2150,7 @@
     </p:spTree>
     <p:extLst>
       <p:ext uri="{BB962C8B-B14F-4D97-AF65-F5344CB8AC3E}">
-        <p14:creationId xmlns:p14="http://schemas.microsoft.com/office/powerpoint/2010/main" val="2614314258"/>
+        <p14:creationId xmlns:p14="http://schemas.microsoft.com/office/powerpoint/2010/main" xmlns="" val="2614314258"/>
       </p:ext>
     </p:extLst>
   </p:cSld>
@@ -2337,7 +2345,8 @@
           <a:p>
             <a:fld id="{5BCAD085-E8A6-8845-BD4E-CB4CCA059FC4}" type="datetimeFigureOut">
               <a:rPr lang="en-US" smtClean="0"/>
-              <a:t>1/27/13</a:t>
+              <a:pPr/>
+              <a:t>9/27/2026</a:t>
             </a:fld>
             <a:endParaRPr lang="en-US"/>
           </a:p>
@@ -2379,6 +2388,7 @@
           <a:p>
             <a:fld id="{C1FF6DA9-008F-8B48-92A6-B652298478BF}" type="slidenum">
               <a:rPr lang="en-US" smtClean="0"/>
+              <a:pPr/>
               <a:t>‹#›</a:t>
             </a:fld>
             <a:endParaRPr lang="en-US"/>
@@ -2388,7 +2398,7 @@
     </p:spTree>
     <p:extLst>
       <p:ext uri="{BB962C8B-B14F-4D97-AF65-F5344CB8AC3E}">
-        <p14:creationId xmlns:p14="http://schemas.microsoft.com/office/powerpoint/2010/main" val="960648375"/>
+        <p14:creationId xmlns:p14="http://schemas.microsoft.com/office/powerpoint/2010/main" xmlns="" val="960648375"/>
       </p:ext>
     </p:extLst>
   </p:cSld>
@@ -2625,7 +2635,8 @@
           <a:p>
             <a:fld id="{5BCAD085-E8A6-8845-BD4E-CB4CCA059FC4}" type="datetimeFigureOut">
               <a:rPr lang="en-US" smtClean="0"/>
-              <a:t>1/27/13</a:t>
+              <a:pPr/>
+              <a:t>9/27/2026</a:t>
             </a:fld>
             <a:endParaRPr lang="en-US"/>
           </a:p>
@@ -2667,6 +2678,7 @@
           <a:p>
             <a:fld id="{C1FF6DA9-008F-8B48-92A6-B652298478BF}" type="slidenum">
               <a:rPr lang="en-US" smtClean="0"/>
+              <a:pPr/>
               <a:t>‹#›</a:t>
             </a:fld>
             <a:endParaRPr lang="en-US"/>
@@ -2676,7 +2688,7 @@
     </p:spTree>
     <p:extLst>
       <p:ext uri="{BB962C8B-B14F-4D97-AF65-F5344CB8AC3E}">
-        <p14:creationId xmlns:p14="http://schemas.microsoft.com/office/powerpoint/2010/main" val="2782244947"/>
+        <p14:creationId xmlns:p14="http://schemas.microsoft.com/office/powerpoint/2010/main" xmlns="" val="2782244947"/>
       </p:ext>
     </p:extLst>
   </p:cSld>
@@ -3047,7 +3059,8 @@
           <a:p>
             <a:fld id="{5BCAD085-E8A6-8845-BD4E-CB4CCA059FC4}" type="datetimeFigureOut">
               <a:rPr lang="en-US" smtClean="0"/>
-              <a:t>1/27/13</a:t>
+              <a:pPr/>
+              <a:t>9/27/2026</a:t>
             </a:fld>
             <a:endParaRPr lang="en-US"/>
           </a:p>
@@ -3089,6 +3102,7 @@
           <a:p>
             <a:fld id="{C1FF6DA9-008F-8B48-92A6-B652298478BF}" type="slidenum">
               <a:rPr lang="en-US" smtClean="0"/>
+              <a:pPr/>
               <a:t>‹#›</a:t>
             </a:fld>
             <a:endParaRPr lang="en-US"/>
@@ -3098,7 +3112,7 @@
     </p:spTree>
     <p:extLst>
       <p:ext uri="{BB962C8B-B14F-4D97-AF65-F5344CB8AC3E}">
-        <p14:creationId xmlns:p14="http://schemas.microsoft.com/office/powerpoint/2010/main" val="990158736"/>
+        <p14:creationId xmlns:p14="http://schemas.microsoft.com/office/powerpoint/2010/main" xmlns="" val="990158736"/>
       </p:ext>
     </p:extLst>
   </p:cSld>
@@ -3165,7 +3179,8 @@
           <a:p>
             <a:fld id="{5BCAD085-E8A6-8845-BD4E-CB4CCA059FC4}" type="datetimeFigureOut">
               <a:rPr lang="en-US" smtClean="0"/>
-              <a:t>1/27/13</a:t>
+              <a:pPr/>
+              <a:t>9/27/2026</a:t>
             </a:fld>
             <a:endParaRPr lang="en-US"/>
           </a:p>
@@ -3207,6 +3222,7 @@
           <a:p>
             <a:fld id="{C1FF6DA9-008F-8B48-92A6-B652298478BF}" type="slidenum">
               <a:rPr lang="en-US" smtClean="0"/>
+              <a:pPr/>
               <a:t>‹#›</a:t>
             </a:fld>
             <a:endParaRPr lang="en-US"/>
@@ -3216,7 +3232,7 @@
     </p:spTree>
     <p:extLst>
       <p:ext uri="{BB962C8B-B14F-4D97-AF65-F5344CB8AC3E}">
-        <p14:creationId xmlns:p14="http://schemas.microsoft.com/office/powerpoint/2010/main" val="727027711"/>
+        <p14:creationId xmlns:p14="http://schemas.microsoft.com/office/powerpoint/2010/main" xmlns="" val="727027711"/>
       </p:ext>
     </p:extLst>
   </p:cSld>
@@ -3260,7 +3276,8 @@
           <a:p>
             <a:fld id="{5BCAD085-E8A6-8845-BD4E-CB4CCA059FC4}" type="datetimeFigureOut">
               <a:rPr lang="en-US" smtClean="0"/>
-              <a:t>1/27/13</a:t>
+              <a:pPr/>
+              <a:t>9/27/2026</a:t>
             </a:fld>
             <a:endParaRPr lang="en-US"/>
           </a:p>
@@ -3302,6 +3319,7 @@
           <a:p>
             <a:fld id="{C1FF6DA9-008F-8B48-92A6-B652298478BF}" type="slidenum">
               <a:rPr lang="en-US" smtClean="0"/>
+              <a:pPr/>
               <a:t>‹#›</a:t>
             </a:fld>
             <a:endParaRPr lang="en-US"/>
@@ -3311,7 +3329,7 @@
     </p:spTree>
     <p:extLst>
       <p:ext uri="{BB962C8B-B14F-4D97-AF65-F5344CB8AC3E}">
-        <p14:creationId xmlns:p14="http://schemas.microsoft.com/office/powerpoint/2010/main" val="1212999818"/>
+        <p14:creationId xmlns:p14="http://schemas.microsoft.com/office/powerpoint/2010/main" xmlns="" val="1212999818"/>
       </p:ext>
     </p:extLst>
   </p:cSld>
@@ -3537,7 +3555,8 @@
           <a:p>
             <a:fld id="{5BCAD085-E8A6-8845-BD4E-CB4CCA059FC4}" type="datetimeFigureOut">
               <a:rPr lang="en-US" smtClean="0"/>
-              <a:t>1/27/13</a:t>
+              <a:pPr/>
+              <a:t>9/27/2026</a:t>
             </a:fld>
             <a:endParaRPr lang="en-US"/>
           </a:p>
@@ -3579,6 +3598,7 @@
           <a:p>
             <a:fld id="{C1FF6DA9-008F-8B48-92A6-B652298478BF}" type="slidenum">
               <a:rPr lang="en-US" smtClean="0"/>
+              <a:pPr/>
               <a:t>‹#›</a:t>
             </a:fld>
             <a:endParaRPr lang="en-US"/>
@@ -3588,7 +3608,7 @@
     </p:spTree>
     <p:extLst>
       <p:ext uri="{BB962C8B-B14F-4D97-AF65-F5344CB8AC3E}">
-        <p14:creationId xmlns:p14="http://schemas.microsoft.com/office/powerpoint/2010/main" val="1840726560"/>
+        <p14:creationId xmlns:p14="http://schemas.microsoft.com/office/powerpoint/2010/main" xmlns="" val="1840726560"/>
       </p:ext>
     </p:extLst>
   </p:cSld>
@@ -3790,7 +3810,8 @@
           <a:p>
             <a:fld id="{5BCAD085-E8A6-8845-BD4E-CB4CCA059FC4}" type="datetimeFigureOut">
               <a:rPr lang="en-US" smtClean="0"/>
-              <a:t>1/27/13</a:t>
+              <a:pPr/>
+              <a:t>9/27/2026</a:t>
             </a:fld>
             <a:endParaRPr lang="en-US"/>
           </a:p>
@@ -3832,6 +3853,7 @@
           <a:p>
             <a:fld id="{C1FF6DA9-008F-8B48-92A6-B652298478BF}" type="slidenum">
               <a:rPr lang="en-US" smtClean="0"/>
+              <a:pPr/>
               <a:t>‹#›</a:t>
             </a:fld>
             <a:endParaRPr lang="en-US"/>
@@ -3841,7 +3863,7 @@
     </p:spTree>
     <p:extLst>
       <p:ext uri="{BB962C8B-B14F-4D97-AF65-F5344CB8AC3E}">
-        <p14:creationId xmlns:p14="http://schemas.microsoft.com/office/powerpoint/2010/main" val="3889236939"/>
+        <p14:creationId xmlns:p14="http://schemas.microsoft.com/office/powerpoint/2010/main" xmlns="" val="3889236939"/>
       </p:ext>
     </p:extLst>
   </p:cSld>
@@ -4003,7 +4025,8 @@
           <a:p>
             <a:fld id="{5BCAD085-E8A6-8845-BD4E-CB4CCA059FC4}" type="datetimeFigureOut">
               <a:rPr lang="en-US" smtClean="0"/>
-              <a:t>1/27/13</a:t>
+              <a:pPr/>
+              <a:t>9/27/2026</a:t>
             </a:fld>
             <a:endParaRPr lang="en-US"/>
           </a:p>
@@ -4081,6 +4104,7 @@
           <a:p>
             <a:fld id="{C1FF6DA9-008F-8B48-92A6-B652298478BF}" type="slidenum">
               <a:rPr lang="en-US" smtClean="0"/>
+              <a:pPr/>
               <a:t>‹#›</a:t>
             </a:fld>
             <a:endParaRPr lang="en-US"/>
@@ -4090,7 +4114,7 @@
     </p:spTree>
     <p:extLst>
       <p:ext uri="{BB962C8B-B14F-4D97-AF65-F5344CB8AC3E}">
-        <p14:creationId xmlns:p14="http://schemas.microsoft.com/office/powerpoint/2010/main" val="2209977519"/>
+        <p14:creationId xmlns:p14="http://schemas.microsoft.com/office/powerpoint/2010/main" xmlns="" val="2209977519"/>
       </p:ext>
     </p:extLst>
   </p:cSld>
@@ -4362,7 +4386,7 @@
 </file>
 
 <file path=ppt/slides/slide1.xml><?xml version="1.0" encoding="utf-8"?>
-<p:sld xmlns:a="http://schemas.openxmlformats.org/drawingml/2006/main" xmlns:p="http://schemas.openxmlformats.org/presentationml/2006/main" xmlns:r="http://schemas.openxmlformats.org/officeDocument/2006/relationships">
+<p:sld xmlns:a="http://schemas.openxmlformats.org/drawingml/2006/main" xmlns:r="http://schemas.openxmlformats.org/officeDocument/2006/relationships" xmlns:p="http://schemas.openxmlformats.org/presentationml/2006/main">
   <p:cSld>
     <p:spTree>
       <p:nvGrpSpPr>
@@ -4370,7 +4394,14 @@
         <p:cNvGrpSpPr/>
         <p:nvPr/>
       </p:nvGrpSpPr>
-      <p:grpSpPr/>
+      <p:grpSpPr>
+        <a:xfrm>
+          <a:off x="0" y="0"/>
+          <a:ext cx="0" cy="0"/>
+          <a:chOff x="0" y="0"/>
+          <a:chExt cx="0" cy="0"/>
+        </a:xfrm>
+      </p:grpSpPr>
       <p:sp>
         <p:nvSpPr>
           <p:cNvPr id="2" name="Rectangle 1"/>
@@ -4411,6 +4442,7 @@
           <a:lstStyle/>
           <a:p>
             <a:pPr algn="ctr"/>
+            <a:endParaRPr/>
           </a:p>
         </p:txBody>
       </p:sp>
@@ -4454,6 +4486,7 @@
           <a:lstStyle/>
           <a:p>
             <a:pPr algn="ctr"/>
+            <a:endParaRPr/>
           </a:p>
         </p:txBody>
       </p:sp>
@@ -4499,6 +4532,7 @@
           <a:lstStyle/>
           <a:p>
             <a:pPr algn="ctr"/>
+            <a:endParaRPr/>
           </a:p>
         </p:txBody>
       </p:sp>
@@ -4673,6 +4707,7 @@
           <a:lstStyle/>
           <a:p>
             <a:pPr algn="ctr"/>
+            <a:endParaRPr/>
           </a:p>
         </p:txBody>
       </p:sp>
@@ -4685,7 +4720,7 @@
         <p:spPr>
           <a:xfrm>
             <a:off x="1828800" y="4206240"/>
-            <a:ext cx="8534095" cy="1371600"/>
+            <a:ext cx="8534095" cy="292388"/>
           </a:xfrm>
           <a:prstGeom prst="rect">
             <a:avLst/>
@@ -4697,19 +4732,6 @@
             <a:spAutoFit/>
           </a:bodyPr>
           <a:lstStyle/>
-          <a:p>
-            <a:pPr algn="ctr">
-              <a:defRPr sz="1600" b="1">
-                <a:solidFill>
-                  <a:srgbClr val="60A5FA"/>
-                </a:solidFill>
-                <a:latin typeface="Segoe UI"/>
-              </a:defRPr>
-            </a:pPr>
-            <a:r>
-              <a:t>Presented by: Team 2 Members</a:t>
-            </a:r>
-          </a:p>
           <a:p>
             <a:pPr algn="ctr">
               <a:spcBef>
@@ -4723,7 +4745,11 @@
               </a:defRPr>
             </a:pPr>
             <a:r>
-              <a:t>Infosys Springboard Internship 7.0 Batch-2</a:t>
+              <a:rPr smtClean="0"/>
+              <a:t>Infosys </a:t>
+            </a:r>
+            <a:r>
+              <a:t>Springboard Internship 7.0 Batch-2</a:t>
             </a:r>
           </a:p>
         </p:txBody>
@@ -4737,7 +4763,7 @@
 </file>
 
 <file path=ppt/slides/slide2.xml><?xml version="1.0" encoding="utf-8"?>
-<p:sld xmlns:a="http://schemas.openxmlformats.org/drawingml/2006/main" xmlns:p="http://schemas.openxmlformats.org/presentationml/2006/main" xmlns:r="http://schemas.openxmlformats.org/officeDocument/2006/relationships">
+<p:sld xmlns:a="http://schemas.openxmlformats.org/drawingml/2006/main" xmlns:r="http://schemas.openxmlformats.org/officeDocument/2006/relationships" xmlns:p="http://schemas.openxmlformats.org/presentationml/2006/main">
   <p:cSld>
     <p:spTree>
       <p:nvGrpSpPr>
@@ -4745,7 +4771,14 @@
         <p:cNvGrpSpPr/>
         <p:nvPr/>
       </p:nvGrpSpPr>
-      <p:grpSpPr/>
+      <p:grpSpPr>
+        <a:xfrm>
+          <a:off x="0" y="0"/>
+          <a:ext cx="0" cy="0"/>
+          <a:chOff x="0" y="0"/>
+          <a:chExt cx="0" cy="0"/>
+        </a:xfrm>
+      </p:grpSpPr>
       <p:sp>
         <p:nvSpPr>
           <p:cNvPr id="2" name="Rectangle 1"/>
@@ -4786,6 +4819,7 @@
           <a:lstStyle/>
           <a:p>
             <a:pPr algn="ctr"/>
+            <a:endParaRPr/>
           </a:p>
         </p:txBody>
       </p:sp>
@@ -4829,6 +4863,7 @@
           <a:lstStyle/>
           <a:p>
             <a:pPr algn="ctr"/>
+            <a:endParaRPr/>
           </a:p>
         </p:txBody>
       </p:sp>
@@ -4962,6 +4997,7 @@
           <a:lstStyle/>
           <a:p>
             <a:pPr algn="ctr"/>
+            <a:endParaRPr/>
           </a:p>
         </p:txBody>
       </p:sp>
@@ -5005,6 +5041,7 @@
           <a:lstStyle/>
           <a:p>
             <a:pPr algn="ctr"/>
+            <a:endParaRPr/>
           </a:p>
         </p:txBody>
       </p:sp>
@@ -5118,6 +5155,7 @@
           <a:lstStyle/>
           <a:p>
             <a:pPr algn="ctr"/>
+            <a:endParaRPr/>
           </a:p>
         </p:txBody>
       </p:sp>
@@ -5161,6 +5199,7 @@
           <a:lstStyle/>
           <a:p>
             <a:pPr algn="ctr"/>
+            <a:endParaRPr/>
           </a:p>
         </p:txBody>
       </p:sp>
@@ -5274,6 +5313,7 @@
           <a:lstStyle/>
           <a:p>
             <a:pPr algn="ctr"/>
+            <a:endParaRPr/>
           </a:p>
         </p:txBody>
       </p:sp>
@@ -5317,6 +5357,7 @@
           <a:lstStyle/>
           <a:p>
             <a:pPr algn="ctr"/>
+            <a:endParaRPr/>
           </a:p>
         </p:txBody>
       </p:sp>
@@ -5430,6 +5471,7 @@
           <a:lstStyle/>
           <a:p>
             <a:pPr algn="ctr"/>
+            <a:endParaRPr/>
           </a:p>
         </p:txBody>
       </p:sp>
@@ -5473,6 +5515,7 @@
           <a:lstStyle/>
           <a:p>
             <a:pPr algn="ctr"/>
+            <a:endParaRPr/>
           </a:p>
         </p:txBody>
       </p:sp>
@@ -5586,6 +5629,7 @@
           <a:lstStyle/>
           <a:p>
             <a:pPr algn="ctr"/>
+            <a:endParaRPr/>
           </a:p>
         </p:txBody>
       </p:sp>
@@ -5629,6 +5673,7 @@
           <a:lstStyle/>
           <a:p>
             <a:pPr algn="ctr"/>
+            <a:endParaRPr/>
           </a:p>
         </p:txBody>
       </p:sp>
@@ -5742,6 +5787,7 @@
           <a:lstStyle/>
           <a:p>
             <a:pPr algn="ctr"/>
+            <a:endParaRPr/>
           </a:p>
         </p:txBody>
       </p:sp>
@@ -5785,6 +5831,7 @@
           <a:lstStyle/>
           <a:p>
             <a:pPr algn="ctr"/>
+            <a:endParaRPr/>
           </a:p>
         </p:txBody>
       </p:sp>
@@ -5865,7 +5912,7 @@
 </file>
 
 <file path=ppt/slides/slide3.xml><?xml version="1.0" encoding="utf-8"?>
-<p:sld xmlns:a="http://schemas.openxmlformats.org/drawingml/2006/main" xmlns:p="http://schemas.openxmlformats.org/presentationml/2006/main" xmlns:r="http://schemas.openxmlformats.org/officeDocument/2006/relationships">
+<p:sld xmlns:a="http://schemas.openxmlformats.org/drawingml/2006/main" xmlns:r="http://schemas.openxmlformats.org/officeDocument/2006/relationships" xmlns:p="http://schemas.openxmlformats.org/presentationml/2006/main">
   <p:cSld>
     <p:spTree>
       <p:nvGrpSpPr>
@@ -5873,7 +5920,14 @@
         <p:cNvGrpSpPr/>
         <p:nvPr/>
       </p:nvGrpSpPr>
-      <p:grpSpPr/>
+      <p:grpSpPr>
+        <a:xfrm>
+          <a:off x="0" y="0"/>
+          <a:ext cx="0" cy="0"/>
+          <a:chOff x="0" y="0"/>
+          <a:chExt cx="0" cy="0"/>
+        </a:xfrm>
+      </p:grpSpPr>
       <p:sp>
         <p:nvSpPr>
           <p:cNvPr id="2" name="Rectangle 1"/>
@@ -5914,6 +5968,7 @@
           <a:lstStyle/>
           <a:p>
             <a:pPr algn="ctr"/>
+            <a:endParaRPr/>
           </a:p>
         </p:txBody>
       </p:sp>
@@ -5957,6 +6012,7 @@
           <a:lstStyle/>
           <a:p>
             <a:pPr algn="ctr"/>
+            <a:endParaRPr/>
           </a:p>
         </p:txBody>
       </p:sp>
@@ -6086,7 +6142,7 @@
           </a:fontRef>
         </p:style>
         <p:txBody>
-          <a:bodyPr rtlCol="0" anchor="ctr" wrap="square"/>
+          <a:bodyPr wrap="square" rtlCol="0" anchor="ctr"/>
           <a:lstStyle/>
           <a:p>
             <a:pPr algn="ctr">
@@ -6180,6 +6236,7 @@
           <a:lstStyle/>
           <a:p>
             <a:pPr algn="ctr"/>
+            <a:endParaRPr/>
           </a:p>
         </p:txBody>
       </p:sp>
@@ -6223,6 +6280,7 @@
           <a:lstStyle/>
           <a:p>
             <a:pPr algn="ctr"/>
+            <a:endParaRPr/>
           </a:p>
         </p:txBody>
       </p:sp>
@@ -6320,6 +6378,7 @@
           <a:lstStyle/>
           <a:p>
             <a:pPr algn="ctr"/>
+            <a:endParaRPr/>
           </a:p>
         </p:txBody>
       </p:sp>
@@ -6363,6 +6422,7 @@
           <a:lstStyle/>
           <a:p>
             <a:pPr algn="ctr"/>
+            <a:endParaRPr/>
           </a:p>
         </p:txBody>
       </p:sp>
@@ -6460,6 +6520,7 @@
           <a:lstStyle/>
           <a:p>
             <a:pPr algn="ctr"/>
+            <a:endParaRPr/>
           </a:p>
         </p:txBody>
       </p:sp>
@@ -6503,6 +6564,7 @@
           <a:lstStyle/>
           <a:p>
             <a:pPr algn="ctr"/>
+            <a:endParaRPr/>
           </a:p>
         </p:txBody>
       </p:sp>
@@ -6600,6 +6662,7 @@
           <a:lstStyle/>
           <a:p>
             <a:pPr algn="ctr"/>
+            <a:endParaRPr/>
           </a:p>
         </p:txBody>
       </p:sp>
@@ -6643,6 +6706,7 @@
           <a:lstStyle/>
           <a:p>
             <a:pPr algn="ctr"/>
+            <a:endParaRPr/>
           </a:p>
         </p:txBody>
       </p:sp>
@@ -6740,6 +6804,7 @@
           <a:lstStyle/>
           <a:p>
             <a:pPr algn="ctr"/>
+            <a:endParaRPr/>
           </a:p>
         </p:txBody>
       </p:sp>
@@ -6783,6 +6848,7 @@
           <a:lstStyle/>
           <a:p>
             <a:pPr algn="ctr"/>
+            <a:endParaRPr/>
           </a:p>
         </p:txBody>
       </p:sp>
@@ -6902,7 +6968,7 @@
 </file>
 
 <file path=ppt/slides/slide4.xml><?xml version="1.0" encoding="utf-8"?>
-<p:sld xmlns:a="http://schemas.openxmlformats.org/drawingml/2006/main" xmlns:p="http://schemas.openxmlformats.org/presentationml/2006/main" xmlns:r="http://schemas.openxmlformats.org/officeDocument/2006/relationships">
+<p:sld xmlns:a="http://schemas.openxmlformats.org/drawingml/2006/main" xmlns:r="http://schemas.openxmlformats.org/officeDocument/2006/relationships" xmlns:p="http://schemas.openxmlformats.org/presentationml/2006/main">
   <p:cSld>
     <p:spTree>
       <p:nvGrpSpPr>
@@ -6910,7 +6976,14 @@
         <p:cNvGrpSpPr/>
         <p:nvPr/>
       </p:nvGrpSpPr>
-      <p:grpSpPr/>
+      <p:grpSpPr>
+        <a:xfrm>
+          <a:off x="0" y="0"/>
+          <a:ext cx="0" cy="0"/>
+          <a:chOff x="0" y="0"/>
+          <a:chExt cx="0" cy="0"/>
+        </a:xfrm>
+      </p:grpSpPr>
       <p:sp>
         <p:nvSpPr>
           <p:cNvPr id="2" name="Rectangle 1"/>
@@ -6951,6 +7024,7 @@
           <a:lstStyle/>
           <a:p>
             <a:pPr algn="ctr"/>
+            <a:endParaRPr/>
           </a:p>
         </p:txBody>
       </p:sp>
@@ -6994,6 +7068,7 @@
           <a:lstStyle/>
           <a:p>
             <a:pPr algn="ctr"/>
+            <a:endParaRPr/>
           </a:p>
         </p:txBody>
       </p:sp>
@@ -7127,6 +7202,7 @@
           <a:lstStyle/>
           <a:p>
             <a:pPr algn="ctr"/>
+            <a:endParaRPr/>
           </a:p>
         </p:txBody>
       </p:sp>
@@ -7170,6 +7246,7 @@
           <a:lstStyle/>
           <a:p>
             <a:pPr algn="ctr"/>
+            <a:endParaRPr/>
           </a:p>
         </p:txBody>
       </p:sp>
@@ -7279,7 +7356,7 @@
           </a:fontRef>
         </p:style>
         <p:txBody>
-          <a:bodyPr rtlCol="0" anchor="ctr" wrap="square"/>
+          <a:bodyPr wrap="square" rtlCol="0" anchor="ctr"/>
           <a:lstStyle/>
           <a:p>
             <a:pPr algn="ctr">
@@ -7338,6 +7415,7 @@
           <a:lstStyle/>
           <a:p>
             <a:pPr algn="ctr"/>
+            <a:endParaRPr/>
           </a:p>
         </p:txBody>
       </p:sp>
@@ -7381,6 +7459,7 @@
           <a:lstStyle/>
           <a:p>
             <a:pPr algn="ctr"/>
+            <a:endParaRPr/>
           </a:p>
         </p:txBody>
       </p:sp>
@@ -7490,7 +7569,7 @@
           </a:fontRef>
         </p:style>
         <p:txBody>
-          <a:bodyPr rtlCol="0" anchor="ctr" wrap="square"/>
+          <a:bodyPr wrap="square" rtlCol="0" anchor="ctr"/>
           <a:lstStyle/>
           <a:p>
             <a:pPr algn="ctr">
@@ -7549,6 +7628,7 @@
           <a:lstStyle/>
           <a:p>
             <a:pPr algn="ctr"/>
+            <a:endParaRPr/>
           </a:p>
         </p:txBody>
       </p:sp>
@@ -7592,6 +7672,7 @@
           <a:lstStyle/>
           <a:p>
             <a:pPr algn="ctr"/>
+            <a:endParaRPr/>
           </a:p>
         </p:txBody>
       </p:sp>
@@ -7701,7 +7782,7 @@
           </a:fontRef>
         </p:style>
         <p:txBody>
-          <a:bodyPr rtlCol="0" anchor="ctr" wrap="square"/>
+          <a:bodyPr wrap="square" rtlCol="0" anchor="ctr"/>
           <a:lstStyle/>
           <a:p>
             <a:pPr algn="ctr">
@@ -7760,6 +7841,7 @@
           <a:lstStyle/>
           <a:p>
             <a:pPr algn="ctr"/>
+            <a:endParaRPr/>
           </a:p>
         </p:txBody>
       </p:sp>
@@ -7803,6 +7885,7 @@
           <a:lstStyle/>
           <a:p>
             <a:pPr algn="ctr"/>
+            <a:endParaRPr/>
           </a:p>
         </p:txBody>
       </p:sp>
@@ -7912,7 +7995,7 @@
           </a:fontRef>
         </p:style>
         <p:txBody>
-          <a:bodyPr rtlCol="0" anchor="ctr" wrap="square"/>
+          <a:bodyPr wrap="square" rtlCol="0" anchor="ctr"/>
           <a:lstStyle/>
           <a:p>
             <a:pPr algn="ctr">
@@ -7938,7 +8021,7 @@
 </file>
 
 <file path=ppt/slides/slide5.xml><?xml version="1.0" encoding="utf-8"?>
-<p:sld xmlns:a="http://schemas.openxmlformats.org/drawingml/2006/main" xmlns:p="http://schemas.openxmlformats.org/presentationml/2006/main" xmlns:r="http://schemas.openxmlformats.org/officeDocument/2006/relationships">
+<p:sld xmlns:a="http://schemas.openxmlformats.org/drawingml/2006/main" xmlns:r="http://schemas.openxmlformats.org/officeDocument/2006/relationships" xmlns:p="http://schemas.openxmlformats.org/presentationml/2006/main">
   <p:cSld>
     <p:spTree>
       <p:nvGrpSpPr>
@@ -7946,7 +8029,14 @@
         <p:cNvGrpSpPr/>
         <p:nvPr/>
       </p:nvGrpSpPr>
-      <p:grpSpPr/>
+      <p:grpSpPr>
+        <a:xfrm>
+          <a:off x="0" y="0"/>
+          <a:ext cx="0" cy="0"/>
+          <a:chOff x="0" y="0"/>
+          <a:chExt cx="0" cy="0"/>
+        </a:xfrm>
+      </p:grpSpPr>
       <p:sp>
         <p:nvSpPr>
           <p:cNvPr id="2" name="Rectangle 1"/>
@@ -7987,6 +8077,7 @@
           <a:lstStyle/>
           <a:p>
             <a:pPr algn="ctr"/>
+            <a:endParaRPr/>
           </a:p>
         </p:txBody>
       </p:sp>
@@ -8030,6 +8121,7 @@
           <a:lstStyle/>
           <a:p>
             <a:pPr algn="ctr"/>
+            <a:endParaRPr/>
           </a:p>
         </p:txBody>
       </p:sp>
@@ -8163,6 +8255,7 @@
           <a:lstStyle/>
           <a:p>
             <a:pPr algn="ctr"/>
+            <a:endParaRPr/>
           </a:p>
         </p:txBody>
       </p:sp>
@@ -8204,7 +8297,7 @@
           </a:fontRef>
         </p:style>
         <p:txBody>
-          <a:bodyPr rtlCol="0" anchor="ctr" wrap="square"/>
+          <a:bodyPr wrap="square" rtlCol="0" anchor="ctr"/>
           <a:lstStyle/>
           <a:p>
             <a:pPr algn="ctr">
@@ -8336,6 +8429,7 @@
           <a:lstStyle/>
           <a:p>
             <a:pPr algn="ctr"/>
+            <a:endParaRPr/>
           </a:p>
         </p:txBody>
       </p:sp>
@@ -8381,6 +8475,7 @@
           <a:lstStyle/>
           <a:p>
             <a:pPr algn="ctr"/>
+            <a:endParaRPr/>
           </a:p>
         </p:txBody>
       </p:sp>
@@ -8422,7 +8517,7 @@
           </a:fontRef>
         </p:style>
         <p:txBody>
-          <a:bodyPr rtlCol="0" anchor="ctr" wrap="square"/>
+          <a:bodyPr wrap="square" rtlCol="0" anchor="ctr"/>
           <a:lstStyle/>
           <a:p>
             <a:pPr algn="ctr">
@@ -8554,6 +8649,7 @@
           <a:lstStyle/>
           <a:p>
             <a:pPr algn="ctr"/>
+            <a:endParaRPr/>
           </a:p>
         </p:txBody>
       </p:sp>
@@ -8599,6 +8695,7 @@
           <a:lstStyle/>
           <a:p>
             <a:pPr algn="ctr"/>
+            <a:endParaRPr/>
           </a:p>
         </p:txBody>
       </p:sp>
@@ -8640,7 +8737,7 @@
           </a:fontRef>
         </p:style>
         <p:txBody>
-          <a:bodyPr rtlCol="0" anchor="ctr" wrap="square"/>
+          <a:bodyPr wrap="square" rtlCol="0" anchor="ctr"/>
           <a:lstStyle/>
           <a:p>
             <a:pPr algn="ctr">
@@ -8772,6 +8869,7 @@
           <a:lstStyle/>
           <a:p>
             <a:pPr algn="ctr"/>
+            <a:endParaRPr/>
           </a:p>
         </p:txBody>
       </p:sp>
@@ -8817,6 +8915,7 @@
           <a:lstStyle/>
           <a:p>
             <a:pPr algn="ctr"/>
+            <a:endParaRPr/>
           </a:p>
         </p:txBody>
       </p:sp>
@@ -8858,7 +8957,7 @@
           </a:fontRef>
         </p:style>
         <p:txBody>
-          <a:bodyPr rtlCol="0" anchor="ctr" wrap="square"/>
+          <a:bodyPr wrap="square" rtlCol="0" anchor="ctr"/>
           <a:lstStyle/>
           <a:p>
             <a:pPr algn="ctr">
@@ -8990,6 +9089,7 @@
           <a:lstStyle/>
           <a:p>
             <a:pPr algn="ctr"/>
+            <a:endParaRPr/>
           </a:p>
         </p:txBody>
       </p:sp>
@@ -9035,6 +9135,7 @@
           <a:lstStyle/>
           <a:p>
             <a:pPr algn="ctr"/>
+            <a:endParaRPr/>
           </a:p>
         </p:txBody>
       </p:sp>
@@ -9076,7 +9177,7 @@
           </a:fontRef>
         </p:style>
         <p:txBody>
-          <a:bodyPr rtlCol="0" anchor="ctr" wrap="square"/>
+          <a:bodyPr wrap="square" rtlCol="0" anchor="ctr"/>
           <a:lstStyle/>
           <a:p>
             <a:pPr algn="ctr">
@@ -9206,7 +9307,7 @@
           </a:fontRef>
         </p:style>
         <p:txBody>
-          <a:bodyPr rtlCol="0" anchor="ctr" wrap="square"/>
+          <a:bodyPr wrap="square" rtlCol="0" anchor="ctr"/>
           <a:lstStyle/>
           <a:p>
             <a:pPr algn="ctr">
@@ -9251,7 +9352,7 @@
 </file>
 
 <file path=ppt/slides/slide6.xml><?xml version="1.0" encoding="utf-8"?>
-<p:sld xmlns:a="http://schemas.openxmlformats.org/drawingml/2006/main" xmlns:p="http://schemas.openxmlformats.org/presentationml/2006/main" xmlns:r="http://schemas.openxmlformats.org/officeDocument/2006/relationships">
+<p:sld xmlns:a="http://schemas.openxmlformats.org/drawingml/2006/main" xmlns:r="http://schemas.openxmlformats.org/officeDocument/2006/relationships" xmlns:p="http://schemas.openxmlformats.org/presentationml/2006/main">
   <p:cSld>
     <p:spTree>
       <p:nvGrpSpPr>
@@ -9259,7 +9360,14 @@
         <p:cNvGrpSpPr/>
         <p:nvPr/>
       </p:nvGrpSpPr>
-      <p:grpSpPr/>
+      <p:grpSpPr>
+        <a:xfrm>
+          <a:off x="0" y="0"/>
+          <a:ext cx="0" cy="0"/>
+          <a:chOff x="0" y="0"/>
+          <a:chExt cx="0" cy="0"/>
+        </a:xfrm>
+      </p:grpSpPr>
       <p:sp>
         <p:nvSpPr>
           <p:cNvPr id="2" name="Rectangle 1"/>
@@ -9300,6 +9408,7 @@
           <a:lstStyle/>
           <a:p>
             <a:pPr algn="ctr"/>
+            <a:endParaRPr/>
           </a:p>
         </p:txBody>
       </p:sp>
@@ -9343,6 +9452,7 @@
           <a:lstStyle/>
           <a:p>
             <a:pPr algn="ctr"/>
+            <a:endParaRPr/>
           </a:p>
         </p:txBody>
       </p:sp>
@@ -9476,6 +9586,7 @@
           <a:lstStyle/>
           <a:p>
             <a:pPr algn="ctr"/>
+            <a:endParaRPr/>
           </a:p>
         </p:txBody>
       </p:sp>
@@ -9695,6 +9806,7 @@
           <a:lstStyle/>
           <a:p>
             <a:pPr algn="ctr"/>
+            <a:endParaRPr/>
           </a:p>
         </p:txBody>
       </p:sp>
@@ -9936,7 +10048,7 @@
 </file>
 
 <file path=ppt/slides/slide7.xml><?xml version="1.0" encoding="utf-8"?>
-<p:sld xmlns:a="http://schemas.openxmlformats.org/drawingml/2006/main" xmlns:p="http://schemas.openxmlformats.org/presentationml/2006/main" xmlns:r="http://schemas.openxmlformats.org/officeDocument/2006/relationships">
+<p:sld xmlns:a="http://schemas.openxmlformats.org/drawingml/2006/main" xmlns:r="http://schemas.openxmlformats.org/officeDocument/2006/relationships" xmlns:p="http://schemas.openxmlformats.org/presentationml/2006/main">
   <p:cSld>
     <p:spTree>
       <p:nvGrpSpPr>
@@ -9944,7 +10056,14 @@
         <p:cNvGrpSpPr/>
         <p:nvPr/>
       </p:nvGrpSpPr>
-      <p:grpSpPr/>
+      <p:grpSpPr>
+        <a:xfrm>
+          <a:off x="0" y="0"/>
+          <a:ext cx="0" cy="0"/>
+          <a:chOff x="0" y="0"/>
+          <a:chExt cx="0" cy="0"/>
+        </a:xfrm>
+      </p:grpSpPr>
       <p:sp>
         <p:nvSpPr>
           <p:cNvPr id="2" name="Rectangle 1"/>
@@ -9985,6 +10104,7 @@
           <a:lstStyle/>
           <a:p>
             <a:pPr algn="ctr"/>
+            <a:endParaRPr/>
           </a:p>
         </p:txBody>
       </p:sp>
@@ -10028,6 +10148,7 @@
           <a:lstStyle/>
           <a:p>
             <a:pPr algn="ctr"/>
+            <a:endParaRPr/>
           </a:p>
         </p:txBody>
       </p:sp>
@@ -10161,6 +10282,7 @@
           <a:lstStyle/>
           <a:p>
             <a:pPr algn="ctr"/>
+            <a:endParaRPr/>
           </a:p>
         </p:txBody>
       </p:sp>
@@ -10366,6 +10488,7 @@
           <a:lstStyle/>
           <a:p>
             <a:pPr algn="ctr"/>
+            <a:endParaRPr/>
           </a:p>
         </p:txBody>
       </p:sp>
@@ -10411,6 +10534,7 @@
           <a:lstStyle/>
           <a:p>
             <a:pPr algn="ctr"/>
+            <a:endParaRPr/>
           </a:p>
         </p:txBody>
       </p:sp>
@@ -10616,6 +10740,7 @@
           <a:lstStyle/>
           <a:p>
             <a:pPr algn="ctr"/>
+            <a:endParaRPr/>
           </a:p>
         </p:txBody>
       </p:sp>
@@ -10661,6 +10786,7 @@
           <a:lstStyle/>
           <a:p>
             <a:pPr algn="ctr"/>
+            <a:endParaRPr/>
           </a:p>
         </p:txBody>
       </p:sp>
@@ -10866,6 +10992,7 @@
           <a:lstStyle/>
           <a:p>
             <a:pPr algn="ctr"/>
+            <a:endParaRPr/>
           </a:p>
         </p:txBody>
       </p:sp>
@@ -10911,6 +11038,7 @@
           <a:lstStyle/>
           <a:p>
             <a:pPr algn="ctr"/>
+            <a:endParaRPr/>
           </a:p>
         </p:txBody>
       </p:sp>
@@ -11116,6 +11244,7 @@
           <a:lstStyle/>
           <a:p>
             <a:pPr algn="ctr"/>
+            <a:endParaRPr/>
           </a:p>
         </p:txBody>
       </p:sp>
@@ -11161,6 +11290,7 @@
           <a:lstStyle/>
           <a:p>
             <a:pPr algn="ctr"/>
+            <a:endParaRPr/>
           </a:p>
         </p:txBody>
       </p:sp>
@@ -11364,7 +11494,7 @@
           </a:fontRef>
         </p:style>
         <p:txBody>
-          <a:bodyPr rtlCol="0" anchor="ctr" wrap="square"/>
+          <a:bodyPr wrap="square" rtlCol="0" anchor="ctr"/>
           <a:lstStyle/>
           <a:p>
             <a:pPr algn="ctr">
@@ -11409,7 +11539,7 @@
 </file>
 
 <file path=ppt/slides/slide8.xml><?xml version="1.0" encoding="utf-8"?>
-<p:sld xmlns:a="http://schemas.openxmlformats.org/drawingml/2006/main" xmlns:p="http://schemas.openxmlformats.org/presentationml/2006/main" xmlns:r="http://schemas.openxmlformats.org/officeDocument/2006/relationships">
+<p:sld xmlns:a="http://schemas.openxmlformats.org/drawingml/2006/main" xmlns:r="http://schemas.openxmlformats.org/officeDocument/2006/relationships" xmlns:p="http://schemas.openxmlformats.org/presentationml/2006/main">
   <p:cSld>
     <p:spTree>
       <p:nvGrpSpPr>
@@ -11417,7 +11547,14 @@
         <p:cNvGrpSpPr/>
         <p:nvPr/>
       </p:nvGrpSpPr>
-      <p:grpSpPr/>
+      <p:grpSpPr>
+        <a:xfrm>
+          <a:off x="0" y="0"/>
+          <a:ext cx="0" cy="0"/>
+          <a:chOff x="0" y="0"/>
+          <a:chExt cx="0" cy="0"/>
+        </a:xfrm>
+      </p:grpSpPr>
       <p:sp>
         <p:nvSpPr>
           <p:cNvPr id="2" name="Rectangle 1"/>
@@ -11458,6 +11595,7 @@
           <a:lstStyle/>
           <a:p>
             <a:pPr algn="ctr"/>
+            <a:endParaRPr/>
           </a:p>
         </p:txBody>
       </p:sp>
@@ -11501,6 +11639,7 @@
           <a:lstStyle/>
           <a:p>
             <a:pPr algn="ctr"/>
+            <a:endParaRPr/>
           </a:p>
         </p:txBody>
       </p:sp>
@@ -11634,6 +11773,7 @@
           <a:lstStyle/>
           <a:p>
             <a:pPr algn="ctr"/>
+            <a:endParaRPr/>
           </a:p>
         </p:txBody>
       </p:sp>
@@ -11677,6 +11817,7 @@
           <a:lstStyle/>
           <a:p>
             <a:pPr algn="ctr"/>
+            <a:endParaRPr/>
           </a:p>
         </p:txBody>
       </p:sp>
@@ -11790,6 +11931,7 @@
           <a:lstStyle/>
           <a:p>
             <a:pPr algn="ctr"/>
+            <a:endParaRPr/>
           </a:p>
         </p:txBody>
       </p:sp>
@@ -11833,6 +11975,7 @@
           <a:lstStyle/>
           <a:p>
             <a:pPr algn="ctr"/>
+            <a:endParaRPr/>
           </a:p>
         </p:txBody>
       </p:sp>
@@ -11946,6 +12089,7 @@
           <a:lstStyle/>
           <a:p>
             <a:pPr algn="ctr"/>
+            <a:endParaRPr/>
           </a:p>
         </p:txBody>
       </p:sp>
@@ -11989,6 +12133,7 @@
           <a:lstStyle/>
           <a:p>
             <a:pPr algn="ctr"/>
+            <a:endParaRPr/>
           </a:p>
         </p:txBody>
       </p:sp>
@@ -12102,6 +12247,7 @@
           <a:lstStyle/>
           <a:p>
             <a:pPr algn="ctr"/>
+            <a:endParaRPr/>
           </a:p>
         </p:txBody>
       </p:sp>
@@ -12145,6 +12291,7 @@
           <a:lstStyle/>
           <a:p>
             <a:pPr algn="ctr"/>
+            <a:endParaRPr/>
           </a:p>
         </p:txBody>
       </p:sp>
@@ -12258,6 +12405,7 @@
           <a:lstStyle/>
           <a:p>
             <a:pPr algn="ctr"/>
+            <a:endParaRPr/>
           </a:p>
         </p:txBody>
       </p:sp>
@@ -12301,6 +12449,7 @@
           <a:lstStyle/>
           <a:p>
             <a:pPr algn="ctr"/>
+            <a:endParaRPr/>
           </a:p>
         </p:txBody>
       </p:sp>
@@ -12414,6 +12563,7 @@
           <a:lstStyle/>
           <a:p>
             <a:pPr algn="ctr"/>
+            <a:endParaRPr/>
           </a:p>
         </p:txBody>
       </p:sp>
@@ -12457,6 +12607,7 @@
           <a:lstStyle/>
           <a:p>
             <a:pPr algn="ctr"/>
+            <a:endParaRPr/>
           </a:p>
         </p:txBody>
       </p:sp>
@@ -12537,7 +12688,7 @@
 </file>
 
 <file path=ppt/slides/slide9.xml><?xml version="1.0" encoding="utf-8"?>
-<p:sld xmlns:a="http://schemas.openxmlformats.org/drawingml/2006/main" xmlns:p="http://schemas.openxmlformats.org/presentationml/2006/main" xmlns:r="http://schemas.openxmlformats.org/officeDocument/2006/relationships">
+<p:sld xmlns:a="http://schemas.openxmlformats.org/drawingml/2006/main" xmlns:r="http://schemas.openxmlformats.org/officeDocument/2006/relationships" xmlns:p="http://schemas.openxmlformats.org/presentationml/2006/main">
   <p:cSld>
     <p:spTree>
       <p:nvGrpSpPr>
@@ -12545,7 +12696,14 @@
         <p:cNvGrpSpPr/>
         <p:nvPr/>
       </p:nvGrpSpPr>
-      <p:grpSpPr/>
+      <p:grpSpPr>
+        <a:xfrm>
+          <a:off x="0" y="0"/>
+          <a:ext cx="0" cy="0"/>
+          <a:chOff x="0" y="0"/>
+          <a:chExt cx="0" cy="0"/>
+        </a:xfrm>
+      </p:grpSpPr>
       <p:sp>
         <p:nvSpPr>
           <p:cNvPr id="2" name="Rectangle 1"/>
@@ -12586,6 +12744,7 @@
           <a:lstStyle/>
           <a:p>
             <a:pPr algn="ctr"/>
+            <a:endParaRPr/>
           </a:p>
         </p:txBody>
       </p:sp>
@@ -12629,6 +12788,7 @@
           <a:lstStyle/>
           <a:p>
             <a:pPr algn="ctr"/>
+            <a:endParaRPr/>
           </a:p>
         </p:txBody>
       </p:sp>
@@ -12758,7 +12918,7 @@
           </a:fontRef>
         </p:style>
         <p:txBody>
-          <a:bodyPr rtlCol="0" anchor="ctr" wrap="square"/>
+          <a:bodyPr wrap="square" rtlCol="0" anchor="ctr"/>
           <a:lstStyle/>
           <a:p>
             <a:pPr algn="ctr">
@@ -12836,6 +12996,7 @@
           <a:lstStyle/>
           <a:p>
             <a:pPr algn="ctr"/>
+            <a:endParaRPr/>
           </a:p>
         </p:txBody>
       </p:sp>
@@ -12879,6 +13040,7 @@
           <a:lstStyle/>
           <a:p>
             <a:pPr algn="ctr"/>
+            <a:endParaRPr/>
           </a:p>
         </p:txBody>
       </p:sp>
@@ -12976,6 +13138,7 @@
           <a:lstStyle/>
           <a:p>
             <a:pPr algn="ctr"/>
+            <a:endParaRPr/>
           </a:p>
         </p:txBody>
       </p:sp>
@@ -13019,6 +13182,7 @@
           <a:lstStyle/>
           <a:p>
             <a:pPr algn="ctr"/>
+            <a:endParaRPr/>
           </a:p>
         </p:txBody>
       </p:sp>
@@ -13116,6 +13280,7 @@
           <a:lstStyle/>
           <a:p>
             <a:pPr algn="ctr"/>
+            <a:endParaRPr/>
           </a:p>
         </p:txBody>
       </p:sp>
@@ -13159,6 +13324,7 @@
           <a:lstStyle/>
           <a:p>
             <a:pPr algn="ctr"/>
+            <a:endParaRPr/>
           </a:p>
         </p:txBody>
       </p:sp>
@@ -13256,6 +13422,7 @@
           <a:lstStyle/>
           <a:p>
             <a:pPr algn="ctr"/>
+            <a:endParaRPr/>
           </a:p>
         </p:txBody>
       </p:sp>
@@ -13299,6 +13466,7 @@
           <a:lstStyle/>
           <a:p>
             <a:pPr algn="ctr"/>
+            <a:endParaRPr/>
           </a:p>
         </p:txBody>
       </p:sp>
@@ -13793,7 +13961,6 @@
         <a:font script="Mong" typeface="Mongolian Baiti"/>
         <a:font script="Viet" typeface="Times New Roman"/>
         <a:font script="Uigh" typeface="Microsoft Uighur"/>
-        <a:font script="Geor" typeface="Sylfaen"/>
       </a:majorFont>
       <a:minorFont>
         <a:latin typeface="Calibri"/>
@@ -13828,7 +13995,6 @@
         <a:font script="Mong" typeface="Mongolian Baiti"/>
         <a:font script="Viet" typeface="Arial"/>
         <a:font script="Uigh" typeface="Microsoft Uighur"/>
-        <a:font script="Geor" typeface="Sylfaen"/>
       </a:minorFont>
     </a:fontScheme>
     <a:fmtScheme name="Office">
@@ -13863,16 +14029,20 @@
           <a:gsLst>
             <a:gs pos="0">
               <a:schemeClr val="phClr">
-                <a:tint val="100000"/>
-                <a:shade val="100000"/>
+                <a:shade val="51000"/>
+                <a:satMod val="130000"/>
+              </a:schemeClr>
+            </a:gs>
+            <a:gs pos="80000">
+              <a:schemeClr val="phClr">
+                <a:shade val="93000"/>
                 <a:satMod val="130000"/>
               </a:schemeClr>
             </a:gs>
             <a:gs pos="100000">
               <a:schemeClr val="phClr">
-                <a:tint val="50000"/>
-                <a:shade val="100000"/>
-                <a:satMod val="350000"/>
+                <a:shade val="94000"/>
+                <a:satMod val="135000"/>
               </a:schemeClr>
             </a:gs>
           </a:gsLst>
@@ -13994,46 +14164,7 @@
       </a:bgFillStyleLst>
     </a:fmtScheme>
   </a:themeElements>
-  <a:objectDefaults>
-    <a:spDef>
-      <a:spPr/>
-      <a:bodyPr/>
-      <a:lstStyle/>
-      <a:style>
-        <a:lnRef idx="1">
-          <a:schemeClr val="accent1"/>
-        </a:lnRef>
-        <a:fillRef idx="3">
-          <a:schemeClr val="accent1"/>
-        </a:fillRef>
-        <a:effectRef idx="2">
-          <a:schemeClr val="accent1"/>
-        </a:effectRef>
-        <a:fontRef idx="minor">
-          <a:schemeClr val="lt1"/>
-        </a:fontRef>
-      </a:style>
-    </a:spDef>
-    <a:lnDef>
-      <a:spPr/>
-      <a:bodyPr/>
-      <a:lstStyle/>
-      <a:style>
-        <a:lnRef idx="2">
-          <a:schemeClr val="accent1"/>
-        </a:lnRef>
-        <a:fillRef idx="0">
-          <a:schemeClr val="accent1"/>
-        </a:fillRef>
-        <a:effectRef idx="1">
-          <a:schemeClr val="accent1"/>
-        </a:effectRef>
-        <a:fontRef idx="minor">
-          <a:schemeClr val="tx1"/>
-        </a:fontRef>
-      </a:style>
-    </a:lnDef>
-  </a:objectDefaults>
+  <a:objectDefaults/>
   <a:extraClrSchemeLst/>
 </a:theme>
 </file>